--- a/public/downloads/praesentation/M07.pptx
+++ b/public/downloads/praesentation/M07.pptx
@@ -6182,7 +6182,7 @@
                   </a:txBody>
                   <a:tcPr>
                     <a:solidFill>
-                      <a:srgbClr val="191D2E"/>
+                      <a:srgbClr val="1F2B56"/>
                     </a:solidFill>
                   </a:tcPr>
                 </a:tc>
@@ -6204,7 +6204,7 @@
                   </a:txBody>
                   <a:tcPr>
                     <a:solidFill>
-                      <a:srgbClr val="191D2E"/>
+                      <a:srgbClr val="1F2B56"/>
                     </a:solidFill>
                   </a:tcPr>
                 </a:tc>
@@ -6226,7 +6226,7 @@
                   </a:txBody>
                   <a:tcPr>
                     <a:solidFill>
-                      <a:srgbClr val="191D2E"/>
+                      <a:srgbClr val="1F2B56"/>
                     </a:solidFill>
                   </a:tcPr>
                 </a:tc>
@@ -9495,7 +9495,7 @@
                   </a:txBody>
                   <a:tcPr>
                     <a:solidFill>
-                      <a:srgbClr val="191D2E"/>
+                      <a:srgbClr val="1F2B56"/>
                     </a:solidFill>
                   </a:tcPr>
                 </a:tc>
@@ -9517,7 +9517,7 @@
                   </a:txBody>
                   <a:tcPr>
                     <a:solidFill>
-                      <a:srgbClr val="191D2E"/>
+                      <a:srgbClr val="1F2B56"/>
                     </a:solidFill>
                   </a:tcPr>
                 </a:tc>
@@ -9539,7 +9539,7 @@
                   </a:txBody>
                   <a:tcPr>
                     <a:solidFill>
-                      <a:srgbClr val="191D2E"/>
+                      <a:srgbClr val="1F2B56"/>
                     </a:solidFill>
                   </a:tcPr>
                 </a:tc>
@@ -9561,7 +9561,7 @@
                   </a:txBody>
                   <a:tcPr>
                     <a:solidFill>
-                      <a:srgbClr val="191D2E"/>
+                      <a:srgbClr val="1F2B56"/>
                     </a:solidFill>
                   </a:tcPr>
                 </a:tc>
@@ -12590,29 +12590,29 @@
         </p:nvSpPr>
         <p:spPr>
           <a:xfrm>
-            <a:off x="4064000" y="927100"/>
-            <a:ext cx="508000" cy="647700"/>
-          </a:xfrm>
-          <a:prstGeom prst="rect">
-            <a:avLst/>
-          </a:prstGeom>
-          <a:noFill/>
-        </p:spPr>
-        <p:txBody>
-          <a:bodyPr wrap="square">
+            <a:off x="4064000" y="939799"/>
+            <a:ext cx="762000" cy="647700"/>
+          </a:xfrm>
+          <a:prstGeom prst="rect">
+            <a:avLst/>
+          </a:prstGeom>
+          <a:noFill/>
+        </p:spPr>
+        <p:txBody>
+          <a:bodyPr wrap="none">
             <a:normAutofit/>
           </a:bodyPr>
           <a:lstStyle/>
           <a:p>
             <a:pPr algn="l"/>
             <a:r>
-              <a:rPr sz="2600" b="0" i="1">
+              <a:rPr sz="2400" b="0" i="1">
                 <a:solidFill>
                   <a:srgbClr val="1F2B56"/>
                 </a:solidFill>
                 <a:latin typeface="Georgia"/>
               </a:rPr>
-              <a:t>I.</a:t>
+              <a:t>I</a:t>
             </a:r>
           </a:p>
         </p:txBody>
@@ -12625,8 +12625,8 @@
         </p:nvSpPr>
         <p:spPr>
           <a:xfrm>
-            <a:off x="4699000" y="952500"/>
-            <a:ext cx="6858000" cy="622300"/>
+            <a:off x="4953000" y="952500"/>
+            <a:ext cx="6629400" cy="635000"/>
           </a:xfrm>
           <a:prstGeom prst="rect">
             <a:avLst/>
@@ -12660,7 +12660,7 @@
         </p:nvSpPr>
         <p:spPr>
           <a:xfrm>
-            <a:off x="4064000" y="1574800"/>
+            <a:off x="4064000" y="1587500"/>
             <a:ext cx="7518399" cy="6350"/>
           </a:xfrm>
           <a:prstGeom prst="rect">
@@ -12703,29 +12703,29 @@
         </p:nvSpPr>
         <p:spPr>
           <a:xfrm>
-            <a:off x="4064000" y="1612900"/>
-            <a:ext cx="508000" cy="647700"/>
-          </a:xfrm>
-          <a:prstGeom prst="rect">
-            <a:avLst/>
-          </a:prstGeom>
-          <a:noFill/>
-        </p:spPr>
-        <p:txBody>
-          <a:bodyPr wrap="square">
+            <a:off x="4064000" y="1638300"/>
+            <a:ext cx="762000" cy="647700"/>
+          </a:xfrm>
+          <a:prstGeom prst="rect">
+            <a:avLst/>
+          </a:prstGeom>
+          <a:noFill/>
+        </p:spPr>
+        <p:txBody>
+          <a:bodyPr wrap="none">
             <a:normAutofit/>
           </a:bodyPr>
           <a:lstStyle/>
           <a:p>
             <a:pPr algn="l"/>
             <a:r>
-              <a:rPr sz="2600" b="0" i="1">
+              <a:rPr sz="2400" b="0" i="1">
                 <a:solidFill>
                   <a:srgbClr val="1F2B56"/>
                 </a:solidFill>
                 <a:latin typeface="Georgia"/>
               </a:rPr>
-              <a:t>II.</a:t>
+              <a:t>II</a:t>
             </a:r>
           </a:p>
         </p:txBody>
@@ -12738,8 +12738,8 @@
         </p:nvSpPr>
         <p:spPr>
           <a:xfrm>
-            <a:off x="4699000" y="1638300"/>
-            <a:ext cx="6858000" cy="622300"/>
+            <a:off x="4953000" y="1651000"/>
+            <a:ext cx="6629400" cy="635000"/>
           </a:xfrm>
           <a:prstGeom prst="rect">
             <a:avLst/>
@@ -12773,7 +12773,7 @@
         </p:nvSpPr>
         <p:spPr>
           <a:xfrm>
-            <a:off x="4064000" y="2260600"/>
+            <a:off x="4064000" y="2286000"/>
             <a:ext cx="7518399" cy="6350"/>
           </a:xfrm>
           <a:prstGeom prst="rect">
@@ -12816,29 +12816,29 @@
         </p:nvSpPr>
         <p:spPr>
           <a:xfrm>
-            <a:off x="4064000" y="2298700"/>
-            <a:ext cx="508000" cy="647700"/>
-          </a:xfrm>
-          <a:prstGeom prst="rect">
-            <a:avLst/>
-          </a:prstGeom>
-          <a:noFill/>
-        </p:spPr>
-        <p:txBody>
-          <a:bodyPr wrap="square">
+            <a:off x="4064000" y="2336800"/>
+            <a:ext cx="762000" cy="647700"/>
+          </a:xfrm>
+          <a:prstGeom prst="rect">
+            <a:avLst/>
+          </a:prstGeom>
+          <a:noFill/>
+        </p:spPr>
+        <p:txBody>
+          <a:bodyPr wrap="none">
             <a:normAutofit/>
           </a:bodyPr>
           <a:lstStyle/>
           <a:p>
             <a:pPr algn="l"/>
             <a:r>
-              <a:rPr sz="2600" b="0" i="1">
+              <a:rPr sz="2400" b="0" i="1">
                 <a:solidFill>
                   <a:srgbClr val="1F2B56"/>
                 </a:solidFill>
                 <a:latin typeface="Georgia"/>
               </a:rPr>
-              <a:t>III.</a:t>
+              <a:t>III</a:t>
             </a:r>
           </a:p>
         </p:txBody>
@@ -12851,8 +12851,8 @@
         </p:nvSpPr>
         <p:spPr>
           <a:xfrm>
-            <a:off x="4699000" y="2324100"/>
-            <a:ext cx="6858000" cy="622300"/>
+            <a:off x="4953000" y="2349500"/>
+            <a:ext cx="6629400" cy="635000"/>
           </a:xfrm>
           <a:prstGeom prst="rect">
             <a:avLst/>
@@ -12886,7 +12886,7 @@
         </p:nvSpPr>
         <p:spPr>
           <a:xfrm>
-            <a:off x="4064000" y="2946400"/>
+            <a:off x="4064000" y="2984500"/>
             <a:ext cx="7518399" cy="6350"/>
           </a:xfrm>
           <a:prstGeom prst="rect">
@@ -12929,29 +12929,29 @@
         </p:nvSpPr>
         <p:spPr>
           <a:xfrm>
-            <a:off x="4064000" y="2984500"/>
-            <a:ext cx="508000" cy="647700"/>
-          </a:xfrm>
-          <a:prstGeom prst="rect">
-            <a:avLst/>
-          </a:prstGeom>
-          <a:noFill/>
-        </p:spPr>
-        <p:txBody>
-          <a:bodyPr wrap="square">
+            <a:off x="4064000" y="3035300"/>
+            <a:ext cx="762000" cy="647700"/>
+          </a:xfrm>
+          <a:prstGeom prst="rect">
+            <a:avLst/>
+          </a:prstGeom>
+          <a:noFill/>
+        </p:spPr>
+        <p:txBody>
+          <a:bodyPr wrap="none">
             <a:normAutofit/>
           </a:bodyPr>
           <a:lstStyle/>
           <a:p>
             <a:pPr algn="l"/>
             <a:r>
-              <a:rPr sz="2600" b="0" i="1">
+              <a:rPr sz="2400" b="0" i="1">
                 <a:solidFill>
                   <a:srgbClr val="1F2B56"/>
                 </a:solidFill>
                 <a:latin typeface="Georgia"/>
               </a:rPr>
-              <a:t>IV.</a:t>
+              <a:t>IV</a:t>
             </a:r>
           </a:p>
         </p:txBody>
@@ -12964,8 +12964,8 @@
         </p:nvSpPr>
         <p:spPr>
           <a:xfrm>
-            <a:off x="4699000" y="3009900"/>
-            <a:ext cx="6858000" cy="622300"/>
+            <a:off x="4953000" y="3048000"/>
+            <a:ext cx="6629400" cy="635000"/>
           </a:xfrm>
           <a:prstGeom prst="rect">
             <a:avLst/>
@@ -14526,7 +14526,7 @@
     <p:bg>
       <p:bgPr>
         <a:solidFill>
-          <a:srgbClr val="191D2E"/>
+          <a:srgbClr val="1F2B56"/>
         </a:solidFill>
         <a:effectLst/>
       </p:bgPr>
@@ -16987,7 +16987,7 @@
     <p:bg>
       <p:bgPr>
         <a:solidFill>
-          <a:srgbClr val="191D2E"/>
+          <a:srgbClr val="1F2B56"/>
         </a:solidFill>
         <a:effectLst/>
       </p:bgPr>
@@ -17538,7 +17538,7 @@
     <p:bg>
       <p:bgPr>
         <a:solidFill>
-          <a:srgbClr val="191D2E"/>
+          <a:srgbClr val="1F2B56"/>
         </a:solidFill>
         <a:effectLst/>
       </p:bgPr>
@@ -18047,7 +18047,7 @@
                   </a:txBody>
                   <a:tcPr>
                     <a:solidFill>
-                      <a:srgbClr val="191D2E"/>
+                      <a:srgbClr val="1F2B56"/>
                     </a:solidFill>
                   </a:tcPr>
                 </a:tc>
@@ -18069,7 +18069,7 @@
                   </a:txBody>
                   <a:tcPr>
                     <a:solidFill>
-                      <a:srgbClr val="191D2E"/>
+                      <a:srgbClr val="1F2B56"/>
                     </a:solidFill>
                   </a:tcPr>
                 </a:tc>
@@ -18091,7 +18091,7 @@
                   </a:txBody>
                   <a:tcPr>
                     <a:solidFill>
-                      <a:srgbClr val="191D2E"/>
+                      <a:srgbClr val="1F2B56"/>
                     </a:solidFill>
                   </a:tcPr>
                 </a:tc>
@@ -18113,7 +18113,7 @@
                   </a:txBody>
                   <a:tcPr>
                     <a:solidFill>
-                      <a:srgbClr val="191D2E"/>
+                      <a:srgbClr val="1F2B56"/>
                     </a:solidFill>
                   </a:tcPr>
                 </a:tc>
@@ -22508,7 +22508,7 @@
                   </a:txBody>
                   <a:tcPr>
                     <a:solidFill>
-                      <a:srgbClr val="191D2E"/>
+                      <a:srgbClr val="1F2B56"/>
                     </a:solidFill>
                   </a:tcPr>
                 </a:tc>
@@ -22530,7 +22530,7 @@
                   </a:txBody>
                   <a:tcPr>
                     <a:solidFill>
-                      <a:srgbClr val="191D2E"/>
+                      <a:srgbClr val="1F2B56"/>
                     </a:solidFill>
                   </a:tcPr>
                 </a:tc>
@@ -22552,7 +22552,7 @@
                   </a:txBody>
                   <a:tcPr>
                     <a:solidFill>
-                      <a:srgbClr val="191D2E"/>
+                      <a:srgbClr val="1F2B56"/>
                     </a:solidFill>
                   </a:tcPr>
                 </a:tc>
@@ -22574,7 +22574,7 @@
                   </a:txBody>
                   <a:tcPr>
                     <a:solidFill>
-                      <a:srgbClr val="191D2E"/>
+                      <a:srgbClr val="1F2B56"/>
                     </a:solidFill>
                   </a:tcPr>
                 </a:tc>

--- a/public/downloads/praesentation/M07.pptx
+++ b/public/downloads/praesentation/M07.pptx
@@ -3255,7 +3255,42 @@
       </p:sp>
       <p:sp>
         <p:nvSpPr>
-          <p:cNvPr id="6" name="Rectangle 5"/>
+          <p:cNvPr id="6" name="TextBox 5"/>
+          <p:cNvSpPr txBox="1"/>
+          <p:nvPr/>
+        </p:nvSpPr>
+        <p:spPr>
+          <a:xfrm>
+            <a:off x="685800" y="3977639"/>
+            <a:ext cx="10817352" cy="731520"/>
+          </a:xfrm>
+          <a:prstGeom prst="rect">
+            <a:avLst/>
+          </a:prstGeom>
+          <a:noFill/>
+        </p:spPr>
+        <p:txBody>
+          <a:bodyPr wrap="square">
+            <a:spAutoFit/>
+          </a:bodyPr>
+          <a:lstStyle/>
+          <a:p>
+            <a:pPr algn="l"/>
+            <a:r>
+              <a:rPr sz="1900" b="0" i="1">
+                <a:solidFill>
+                  <a:srgbClr val="BECDE6"/>
+                </a:solidFill>
+                <a:latin typeface="Source Serif 4"/>
+              </a:rPr>
+              <a:t>Arztpraxen, Apotheken und Heilberufe als Firmenkundensegment</a:t>
+            </a:r>
+          </a:p>
+        </p:txBody>
+      </p:sp>
+      <p:sp>
+        <p:nvSpPr>
+          <p:cNvPr id="7" name="Rectangle 6"/>
           <p:cNvSpPr/>
           <p:nvPr/>
         </p:nvSpPr>
@@ -3298,14 +3333,14 @@
       </p:sp>
       <p:sp>
         <p:nvSpPr>
-          <p:cNvPr id="7" name="TextBox 6"/>
+          <p:cNvPr id="8" name="TextBox 7"/>
           <p:cNvSpPr txBox="1"/>
           <p:nvPr/>
         </p:nvSpPr>
         <p:spPr>
           <a:xfrm>
             <a:off x="685800" y="5193792"/>
-            <a:ext cx="10817352" cy="201168"/>
+            <a:ext cx="3605784" cy="201168"/>
           </a:xfrm>
           <a:prstGeom prst="rect">
             <a:avLst/>
@@ -3326,21 +3361,21 @@
                 </a:solidFill>
                 <a:latin typeface="JetBrains Mono"/>
               </a:rPr>
-              <a:t>VERSION</a:t>
-            </a:r>
-          </a:p>
-        </p:txBody>
-      </p:sp>
-      <p:sp>
-        <p:nvSpPr>
-          <p:cNvPr id="8" name="TextBox 7"/>
+              <a:t>KOMPETENZFELD</a:t>
+            </a:r>
+          </a:p>
+        </p:txBody>
+      </p:sp>
+      <p:sp>
+        <p:nvSpPr>
+          <p:cNvPr id="9" name="TextBox 8"/>
           <p:cNvSpPr txBox="1"/>
           <p:nvPr/>
         </p:nvSpPr>
         <p:spPr>
           <a:xfrm>
             <a:off x="685800" y="5394960"/>
-            <a:ext cx="10817352" cy="320040"/>
+            <a:ext cx="3605784" cy="320040"/>
           </a:xfrm>
           <a:prstGeom prst="rect">
             <a:avLst/>
@@ -3361,6 +3396,146 @@
                 </a:solidFill>
                 <a:latin typeface="Arial"/>
               </a:rPr>
+              <a:t>K-02 Branchenwissen</a:t>
+            </a:r>
+          </a:p>
+        </p:txBody>
+      </p:sp>
+      <p:sp>
+        <p:nvSpPr>
+          <p:cNvPr id="10" name="TextBox 9"/>
+          <p:cNvSpPr txBox="1"/>
+          <p:nvPr/>
+        </p:nvSpPr>
+        <p:spPr>
+          <a:xfrm>
+            <a:off x="4291584" y="5193792"/>
+            <a:ext cx="3605784" cy="201168"/>
+          </a:xfrm>
+          <a:prstGeom prst="rect">
+            <a:avLst/>
+          </a:prstGeom>
+          <a:noFill/>
+        </p:spPr>
+        <p:txBody>
+          <a:bodyPr wrap="none">
+            <a:spAutoFit/>
+          </a:bodyPr>
+          <a:lstStyle/>
+          <a:p>
+            <a:pPr algn="l"/>
+            <a:r>
+              <a:rPr sz="700">
+                <a:solidFill>
+                  <a:srgbClr val="A0B4D2"/>
+                </a:solidFill>
+                <a:latin typeface="JetBrains Mono"/>
+              </a:rPr>
+              <a:t>KOMPETENZSTUFE</a:t>
+            </a:r>
+          </a:p>
+        </p:txBody>
+      </p:sp>
+      <p:sp>
+        <p:nvSpPr>
+          <p:cNvPr id="11" name="TextBox 10"/>
+          <p:cNvSpPr txBox="1"/>
+          <p:nvPr/>
+        </p:nvSpPr>
+        <p:spPr>
+          <a:xfrm>
+            <a:off x="4291584" y="5394960"/>
+            <a:ext cx="3605784" cy="320040"/>
+          </a:xfrm>
+          <a:prstGeom prst="rect">
+            <a:avLst/>
+          </a:prstGeom>
+          <a:noFill/>
+        </p:spPr>
+        <p:txBody>
+          <a:bodyPr wrap="square">
+            <a:spAutoFit/>
+          </a:bodyPr>
+          <a:lstStyle/>
+          <a:p>
+            <a:pPr algn="l"/>
+            <a:r>
+              <a:rPr sz="1100" b="0" i="0">
+                <a:solidFill>
+                  <a:srgbClr val="FFFFFF"/>
+                </a:solidFill>
+                <a:latin typeface="Arial"/>
+              </a:rPr>
+              <a:t>Sparringspartner</a:t>
+            </a:r>
+          </a:p>
+        </p:txBody>
+      </p:sp>
+      <p:sp>
+        <p:nvSpPr>
+          <p:cNvPr id="12" name="TextBox 11"/>
+          <p:cNvSpPr txBox="1"/>
+          <p:nvPr/>
+        </p:nvSpPr>
+        <p:spPr>
+          <a:xfrm>
+            <a:off x="7897368" y="5193792"/>
+            <a:ext cx="3605784" cy="201168"/>
+          </a:xfrm>
+          <a:prstGeom prst="rect">
+            <a:avLst/>
+          </a:prstGeom>
+          <a:noFill/>
+        </p:spPr>
+        <p:txBody>
+          <a:bodyPr wrap="none">
+            <a:spAutoFit/>
+          </a:bodyPr>
+          <a:lstStyle/>
+          <a:p>
+            <a:pPr algn="l"/>
+            <a:r>
+              <a:rPr sz="700">
+                <a:solidFill>
+                  <a:srgbClr val="A0B4D2"/>
+                </a:solidFill>
+                <a:latin typeface="JetBrains Mono"/>
+              </a:rPr>
+              <a:t>VERSION</a:t>
+            </a:r>
+          </a:p>
+        </p:txBody>
+      </p:sp>
+      <p:sp>
+        <p:nvSpPr>
+          <p:cNvPr id="13" name="TextBox 12"/>
+          <p:cNvSpPr txBox="1"/>
+          <p:nvPr/>
+        </p:nvSpPr>
+        <p:spPr>
+          <a:xfrm>
+            <a:off x="7897368" y="5394960"/>
+            <a:ext cx="3605784" cy="320040"/>
+          </a:xfrm>
+          <a:prstGeom prst="rect">
+            <a:avLst/>
+          </a:prstGeom>
+          <a:noFill/>
+        </p:spPr>
+        <p:txBody>
+          <a:bodyPr wrap="square">
+            <a:spAutoFit/>
+          </a:bodyPr>
+          <a:lstStyle/>
+          <a:p>
+            <a:pPr algn="l"/>
+            <a:r>
+              <a:rPr sz="1100" b="0" i="0">
+                <a:solidFill>
+                  <a:srgbClr val="FFFFFF"/>
+                </a:solidFill>
+                <a:latin typeface="Arial"/>
+              </a:rPr>
               <a:t>v0.3</a:t>
             </a:r>
           </a:p>
@@ -3368,7 +3543,7 @@
       </p:sp>
       <p:sp>
         <p:nvSpPr>
-          <p:cNvPr id="9" name="Rectangle 8"/>
+          <p:cNvPr id="14" name="Rectangle 13"/>
           <p:cNvSpPr/>
           <p:nvPr/>
         </p:nvSpPr>
@@ -3411,7 +3586,7 @@
       </p:sp>
       <p:sp>
         <p:nvSpPr>
-          <p:cNvPr id="10" name="TextBox 9"/>
+          <p:cNvPr id="15" name="TextBox 14"/>
           <p:cNvSpPr txBox="1"/>
           <p:nvPr/>
         </p:nvSpPr>
@@ -3446,7 +3621,7 @@
       </p:sp>
       <p:sp>
         <p:nvSpPr>
-          <p:cNvPr id="11" name="TextBox 10"/>
+          <p:cNvPr id="16" name="TextBox 15"/>
           <p:cNvSpPr txBox="1"/>
           <p:nvPr/>
         </p:nvSpPr>
